--- a/Science_Complete_Course_SagarSir/03_Biology_जीव_विज्ञान/Class_16_Microorganisms_Friends_Foe.pptx
+++ b/Science_Complete_Course_SagarSir/03_Biology_जीव_विज्ञान/Class_16_Microorganisms_Friends_Foe.pptx
@@ -3573,7 +3573,7 @@
               </a:defRPr>
             </a:pPr>
             <a:r>
-              <a:t>मार्गदर्शक: सागर सर (NMMS King)  |  Helpline / WhatsApp: +91 91101 13671  |  Website: sagarcoaching.tech</a:t>
+              <a:t>मार्गदर्शक: सागर सर (NMMS King)  |  Website: sagarcoaching.tech</a:t>
             </a:r>
           </a:p>
         </p:txBody>
@@ -3745,7 +3745,7 @@
               </a:defRPr>
             </a:pPr>
             <a:r>
-              <a:t>WhatsApp / Helpline: +91 91101 13671  |  वेबसाइट: sagarcoaching.tech  |  Slide 10 of 37</a:t>
+              <a:t>वेबसाइट: sagarcoaching.tech  |  Slide 10 of 37</a:t>
             </a:r>
           </a:p>
         </p:txBody>
@@ -4192,7 +4192,7 @@
               </a:defRPr>
             </a:pPr>
             <a:r>
-              <a:t>WhatsApp / Helpline: +91 91101 13671  |  वेबसाइट: sagarcoaching.tech  |  Slide 11 of 37</a:t>
+              <a:t>वेबसाइट: sagarcoaching.tech  |  Slide 11 of 37</a:t>
             </a:r>
           </a:p>
         </p:txBody>
@@ -4710,7 +4710,7 @@
               </a:defRPr>
             </a:pPr>
             <a:r>
-              <a:t>WhatsApp / Helpline: +91 91101 13671  |  वेबसाइट: sagarcoaching.tech  |  Slide 12 of 37</a:t>
+              <a:t>वेबसाइट: sagarcoaching.tech  |  Slide 12 of 37</a:t>
             </a:r>
           </a:p>
         </p:txBody>
@@ -5157,7 +5157,7 @@
               </a:defRPr>
             </a:pPr>
             <a:r>
-              <a:t>WhatsApp / Helpline: +91 91101 13671  |  वेबसाइट: sagarcoaching.tech  |  Slide 13 of 37</a:t>
+              <a:t>वेबसाइट: sagarcoaching.tech  |  Slide 13 of 37</a:t>
             </a:r>
           </a:p>
         </p:txBody>
@@ -5675,7 +5675,7 @@
               </a:defRPr>
             </a:pPr>
             <a:r>
-              <a:t>WhatsApp / Helpline: +91 91101 13671  |  वेबसाइट: sagarcoaching.tech  |  Slide 14 of 37</a:t>
+              <a:t>वेबसाइट: sagarcoaching.tech  |  Slide 14 of 37</a:t>
             </a:r>
           </a:p>
         </p:txBody>
@@ -6122,7 +6122,7 @@
               </a:defRPr>
             </a:pPr>
             <a:r>
-              <a:t>WhatsApp / Helpline: +91 91101 13671  |  वेबसाइट: sagarcoaching.tech  |  Slide 15 of 37</a:t>
+              <a:t>वेबसाइट: sagarcoaching.tech  |  Slide 15 of 37</a:t>
             </a:r>
           </a:p>
         </p:txBody>
@@ -6640,7 +6640,7 @@
               </a:defRPr>
             </a:pPr>
             <a:r>
-              <a:t>WhatsApp / Helpline: +91 91101 13671  |  वेबसाइट: sagarcoaching.tech  |  Slide 16 of 37</a:t>
+              <a:t>वेबसाइट: sagarcoaching.tech  |  Slide 16 of 37</a:t>
             </a:r>
           </a:p>
         </p:txBody>
@@ -7087,7 +7087,7 @@
               </a:defRPr>
             </a:pPr>
             <a:r>
-              <a:t>WhatsApp / Helpline: +91 91101 13671  |  वेबसाइट: sagarcoaching.tech  |  Slide 17 of 37</a:t>
+              <a:t>वेबसाइट: sagarcoaching.tech  |  Slide 17 of 37</a:t>
             </a:r>
           </a:p>
         </p:txBody>
@@ -7605,7 +7605,7 @@
               </a:defRPr>
             </a:pPr>
             <a:r>
-              <a:t>WhatsApp / Helpline: +91 91101 13671  |  वेबसाइट: sagarcoaching.tech  |  Slide 18 of 37</a:t>
+              <a:t>वेबसाइट: sagarcoaching.tech  |  Slide 18 of 37</a:t>
             </a:r>
           </a:p>
         </p:txBody>
@@ -8052,7 +8052,7 @@
               </a:defRPr>
             </a:pPr>
             <a:r>
-              <a:t>WhatsApp / Helpline: +91 91101 13671  |  वेबसाइट: sagarcoaching.tech  |  Slide 19 of 37</a:t>
+              <a:t>वेबसाइट: sagarcoaching.tech  |  Slide 19 of 37</a:t>
             </a:r>
           </a:p>
         </p:txBody>
@@ -8570,7 +8570,7 @@
               </a:defRPr>
             </a:pPr>
             <a:r>
-              <a:t>WhatsApp / Helpline: +91 91101 13671  |  वेबसाइट: sagarcoaching.tech  |  Slide 2 of 37</a:t>
+              <a:t>वेबसाइट: sagarcoaching.tech  |  Slide 2 of 37</a:t>
             </a:r>
           </a:p>
         </p:txBody>
@@ -8870,7 +8870,7 @@
               </a:defRPr>
             </a:pPr>
             <a:r>
-              <a:t>WhatsApp / Helpline: +91 91101 13671  |  वेबसाइट: sagarcoaching.tech  |  Slide 20 of 37</a:t>
+              <a:t>वेबसाइट: sagarcoaching.tech  |  Slide 20 of 37</a:t>
             </a:r>
           </a:p>
         </p:txBody>
@@ -9317,7 +9317,7 @@
               </a:defRPr>
             </a:pPr>
             <a:r>
-              <a:t>WhatsApp / Helpline: +91 91101 13671  |  वेबसाइट: sagarcoaching.tech  |  Slide 21 of 37</a:t>
+              <a:t>वेबसाइट: sagarcoaching.tech  |  Slide 21 of 37</a:t>
             </a:r>
           </a:p>
         </p:txBody>
@@ -9835,7 +9835,7 @@
               </a:defRPr>
             </a:pPr>
             <a:r>
-              <a:t>WhatsApp / Helpline: +91 91101 13671  |  वेबसाइट: sagarcoaching.tech  |  Slide 22 of 37</a:t>
+              <a:t>वेबसाइट: sagarcoaching.tech  |  Slide 22 of 37</a:t>
             </a:r>
           </a:p>
         </p:txBody>
@@ -10282,7 +10282,7 @@
               </a:defRPr>
             </a:pPr>
             <a:r>
-              <a:t>WhatsApp / Helpline: +91 91101 13671  |  वेबसाइट: sagarcoaching.tech  |  Slide 23 of 37</a:t>
+              <a:t>वेबसाइट: sagarcoaching.tech  |  Slide 23 of 37</a:t>
             </a:r>
           </a:p>
         </p:txBody>
@@ -10800,7 +10800,7 @@
               </a:defRPr>
             </a:pPr>
             <a:r>
-              <a:t>WhatsApp / Helpline: +91 91101 13671  |  वेबसाइट: sagarcoaching.tech  |  Slide 24 of 37</a:t>
+              <a:t>वेबसाइट: sagarcoaching.tech  |  Slide 24 of 37</a:t>
             </a:r>
           </a:p>
         </p:txBody>
@@ -11247,7 +11247,7 @@
               </a:defRPr>
             </a:pPr>
             <a:r>
-              <a:t>WhatsApp / Helpline: +91 91101 13671  |  वेबसाइट: sagarcoaching.tech  |  Slide 25 of 37</a:t>
+              <a:t>वेबसाइट: sagarcoaching.tech  |  Slide 25 of 37</a:t>
             </a:r>
           </a:p>
         </p:txBody>
@@ -11765,7 +11765,7 @@
               </a:defRPr>
             </a:pPr>
             <a:r>
-              <a:t>WhatsApp / Helpline: +91 91101 13671  |  वेबसाइट: sagarcoaching.tech  |  Slide 26 of 37</a:t>
+              <a:t>वेबसाइट: sagarcoaching.tech  |  Slide 26 of 37</a:t>
             </a:r>
           </a:p>
         </p:txBody>
@@ -12212,7 +12212,7 @@
               </a:defRPr>
             </a:pPr>
             <a:r>
-              <a:t>WhatsApp / Helpline: +91 91101 13671  |  वेबसाइट: sagarcoaching.tech  |  Slide 27 of 37</a:t>
+              <a:t>वेबसाइट: sagarcoaching.tech  |  Slide 27 of 37</a:t>
             </a:r>
           </a:p>
         </p:txBody>
@@ -12730,7 +12730,7 @@
               </a:defRPr>
             </a:pPr>
             <a:r>
-              <a:t>WhatsApp / Helpline: +91 91101 13671  |  वेबसाइट: sagarcoaching.tech  |  Slide 28 of 37</a:t>
+              <a:t>वेबसाइट: sagarcoaching.tech  |  Slide 28 of 37</a:t>
             </a:r>
           </a:p>
         </p:txBody>
@@ -13177,7 +13177,7 @@
               </a:defRPr>
             </a:pPr>
             <a:r>
-              <a:t>WhatsApp / Helpline: +91 91101 13671  |  वेबसाइट: sagarcoaching.tech  |  Slide 29 of 37</a:t>
+              <a:t>वेबसाइट: sagarcoaching.tech  |  Slide 29 of 37</a:t>
             </a:r>
           </a:p>
         </p:txBody>
@@ -13695,7 +13695,7 @@
               </a:defRPr>
             </a:pPr>
             <a:r>
-              <a:t>WhatsApp / Helpline: +91 91101 13671  |  वेबसाइट: sagarcoaching.tech  |  Slide 3 of 37</a:t>
+              <a:t>वेबसाइट: sagarcoaching.tech  |  Slide 3 of 37</a:t>
             </a:r>
           </a:p>
         </p:txBody>
@@ -14017,7 +14017,7 @@
               </a:defRPr>
             </a:pPr>
             <a:r>
-              <a:t>WhatsApp / Helpline: +91 91101 13671  |  वेबसाइट: sagarcoaching.tech  |  Slide 30 of 37</a:t>
+              <a:t>वेबसाइट: sagarcoaching.tech  |  Slide 30 of 37</a:t>
             </a:r>
           </a:p>
         </p:txBody>
@@ -14464,7 +14464,7 @@
               </a:defRPr>
             </a:pPr>
             <a:r>
-              <a:t>WhatsApp / Helpline: +91 91101 13671  |  वेबसाइट: sagarcoaching.tech  |  Slide 31 of 37</a:t>
+              <a:t>वेबसाइट: sagarcoaching.tech  |  Slide 31 of 37</a:t>
             </a:r>
           </a:p>
         </p:txBody>
@@ -14982,7 +14982,7 @@
               </a:defRPr>
             </a:pPr>
             <a:r>
-              <a:t>WhatsApp / Helpline: +91 91101 13671  |  वेबसाइट: sagarcoaching.tech  |  Slide 32 of 37</a:t>
+              <a:t>वेबसाइट: sagarcoaching.tech  |  Slide 32 of 37</a:t>
             </a:r>
           </a:p>
         </p:txBody>
@@ -15429,7 +15429,7 @@
               </a:defRPr>
             </a:pPr>
             <a:r>
-              <a:t>WhatsApp / Helpline: +91 91101 13671  |  वेबसाइट: sagarcoaching.tech  |  Slide 33 of 37</a:t>
+              <a:t>वेबसाइट: sagarcoaching.tech  |  Slide 33 of 37</a:t>
             </a:r>
           </a:p>
         </p:txBody>
@@ -15947,7 +15947,7 @@
               </a:defRPr>
             </a:pPr>
             <a:r>
-              <a:t>WhatsApp / Helpline: +91 91101 13671  |  वेबसाइट: sagarcoaching.tech  |  Slide 34 of 37</a:t>
+              <a:t>वेबसाइट: sagarcoaching.tech  |  Slide 34 of 37</a:t>
             </a:r>
           </a:p>
         </p:txBody>
@@ -16394,7 +16394,7 @@
               </a:defRPr>
             </a:pPr>
             <a:r>
-              <a:t>WhatsApp / Helpline: +91 91101 13671  |  वेबसाइट: sagarcoaching.tech  |  Slide 35 of 37</a:t>
+              <a:t>वेबसाइट: sagarcoaching.tech  |  Slide 35 of 37</a:t>
             </a:r>
           </a:p>
         </p:txBody>
@@ -16912,7 +16912,7 @@
               </a:defRPr>
             </a:pPr>
             <a:r>
-              <a:t>WhatsApp / Helpline: +91 91101 13671  |  वेबसाइट: sagarcoaching.tech  |  Slide 36 of 37</a:t>
+              <a:t>वेबसाइट: sagarcoaching.tech  |  Slide 36 of 37</a:t>
             </a:r>
           </a:p>
         </p:txBody>
@@ -17234,7 +17234,7 @@
               </a:defRPr>
             </a:pPr>
             <a:r>
-              <a:t>WhatsApp / Helpline: +91 91101 13671  |  वेबसाइट: sagarcoaching.tech  |  Slide 37 of 37</a:t>
+              <a:t>वेबसाइट: sagarcoaching.tech  |  Slide 37 of 37</a:t>
             </a:r>
           </a:p>
         </p:txBody>
@@ -17518,7 +17518,7 @@
               </a:defRPr>
             </a:pPr>
             <a:r>
-              <a:t>WhatsApp / Helpline: +91 91101 13671  |  वेबसाइट: sagarcoaching.tech  |  Slide 4 of 37</a:t>
+              <a:t>वेबसाइट: sagarcoaching.tech  |  Slide 4 of 37</a:t>
             </a:r>
           </a:p>
         </p:txBody>
@@ -17852,7 +17852,7 @@
               </a:defRPr>
             </a:pPr>
             <a:r>
-              <a:t>WhatsApp / Helpline: +91 91101 13671  |  वेबसाइट: sagarcoaching.tech  |  Slide 5 of 37</a:t>
+              <a:t>वेबसाइट: sagarcoaching.tech  |  Slide 5 of 37</a:t>
             </a:r>
           </a:p>
         </p:txBody>
@@ -18193,7 +18193,7 @@
               </a:defRPr>
             </a:pPr>
             <a:r>
-              <a:t>WhatsApp / Helpline: +91 91101 13671  |  वेबसाइट: sagarcoaching.tech  |  Slide 6 of 37</a:t>
+              <a:t>वेबसाइट: sagarcoaching.tech  |  Slide 6 of 37</a:t>
             </a:r>
           </a:p>
         </p:txBody>
@@ -18640,7 +18640,7 @@
               </a:defRPr>
             </a:pPr>
             <a:r>
-              <a:t>WhatsApp / Helpline: +91 91101 13671  |  वेबसाइट: sagarcoaching.tech  |  Slide 7 of 37</a:t>
+              <a:t>वेबसाइट: sagarcoaching.tech  |  Slide 7 of 37</a:t>
             </a:r>
           </a:p>
         </p:txBody>
@@ -19158,7 +19158,7 @@
               </a:defRPr>
             </a:pPr>
             <a:r>
-              <a:t>WhatsApp / Helpline: +91 91101 13671  |  वेबसाइट: sagarcoaching.tech  |  Slide 8 of 37</a:t>
+              <a:t>वेबसाइट: sagarcoaching.tech  |  Slide 8 of 37</a:t>
             </a:r>
           </a:p>
         </p:txBody>
@@ -19605,7 +19605,7 @@
               </a:defRPr>
             </a:pPr>
             <a:r>
-              <a:t>WhatsApp / Helpline: +91 91101 13671  |  वेबसाइट: sagarcoaching.tech  |  Slide 9 of 37</a:t>
+              <a:t>वेबसाइट: sagarcoaching.tech  |  Slide 9 of 37</a:t>
             </a:r>
           </a:p>
         </p:txBody>
